--- a/03-build/pptx/C4_U8_alumno.pptx
+++ b/03-build/pptx/C4_U8_alumno.pptx
@@ -4236,7 +4236,6 @@
               <a:srgbClr val="E4E3DE"/>
             </a:solidFill>
           </a:ln>
-          <a:effectLst/>
           <a:effectLst>
             <a:outerShdw blurRad="90000" dist="38000" dir="5400000" rotWithShape="0">
               <a:srgbClr val="20242E">
@@ -5608,7 +5607,6 @@
               <a:srgbClr val="D64550"/>
             </a:solidFill>
           </a:ln>
-          <a:effectLst/>
           <a:effectLst>
             <a:outerShdw blurRad="90000" dist="38000" dir="5400000" rotWithShape="0">
               <a:srgbClr val="20242E">
@@ -5796,7 +5794,6 @@
               <a:srgbClr val="E4E3DE"/>
             </a:solidFill>
           </a:ln>
-          <a:effectLst/>
           <a:effectLst>
             <a:outerShdw blurRad="90000" dist="38000" dir="5400000" rotWithShape="0">
               <a:srgbClr val="20242E">
@@ -6543,7 +6540,6 @@
               <a:srgbClr val="E4E3DE"/>
             </a:solidFill>
           </a:ln>
-          <a:effectLst/>
           <a:effectLst>
             <a:outerShdw blurRad="90000" dist="38000" dir="5400000" rotWithShape="0">
               <a:srgbClr val="20242E">
@@ -6687,7 +6683,6 @@
               <a:srgbClr val="E4E3DE"/>
             </a:solidFill>
           </a:ln>
-          <a:effectLst/>
           <a:effectLst>
             <a:outerShdw blurRad="90000" dist="38000" dir="5400000" rotWithShape="0">
               <a:srgbClr val="20242E">
@@ -6831,7 +6826,6 @@
               <a:srgbClr val="E4E3DE"/>
             </a:solidFill>
           </a:ln>
-          <a:effectLst/>
           <a:effectLst>
             <a:outerShdw blurRad="90000" dist="38000" dir="5400000" rotWithShape="0">
               <a:srgbClr val="20242E">
@@ -6975,7 +6969,6 @@
               <a:srgbClr val="E4E3DE"/>
             </a:solidFill>
           </a:ln>
-          <a:effectLst/>
           <a:effectLst>
             <a:outerShdw blurRad="90000" dist="38000" dir="5400000" rotWithShape="0">
               <a:srgbClr val="20242E">
@@ -7119,7 +7112,6 @@
               <a:srgbClr val="E4E3DE"/>
             </a:solidFill>
           </a:ln>
-          <a:effectLst/>
           <a:effectLst>
             <a:outerShdw blurRad="90000" dist="38000" dir="5400000" rotWithShape="0">
               <a:srgbClr val="20242E">
@@ -7263,7 +7255,6 @@
               <a:srgbClr val="E4E3DE"/>
             </a:solidFill>
           </a:ln>
-          <a:effectLst/>
           <a:effectLst>
             <a:outerShdw blurRad="90000" dist="38000" dir="5400000" rotWithShape="0">
               <a:srgbClr val="20242E">
@@ -7407,7 +7398,6 @@
               <a:srgbClr val="D64550"/>
             </a:solidFill>
           </a:ln>
-          <a:effectLst/>
           <a:effectLst>
             <a:outerShdw blurRad="90000" dist="38000" dir="5400000" rotWithShape="0">
               <a:srgbClr val="20242E">
@@ -8138,7 +8128,6 @@
               <a:srgbClr val="D64550"/>
             </a:solidFill>
           </a:ln>
-          <a:effectLst/>
           <a:effectLst>
             <a:outerShdw blurRad="90000" dist="38000" dir="5400000" rotWithShape="0">
               <a:srgbClr val="20242E">
@@ -9402,7 +9391,6 @@
               <a:srgbClr val="D64550"/>
             </a:solidFill>
           </a:ln>
-          <a:effectLst/>
           <a:effectLst>
             <a:outerShdw blurRad="90000" dist="38000" dir="5400000" rotWithShape="0">
               <a:srgbClr val="20242E">
@@ -9644,7 +9632,6 @@
               <a:srgbClr val="E4E3DE"/>
             </a:solidFill>
           </a:ln>
-          <a:effectLst/>
           <a:effectLst>
             <a:outerShdw blurRad="90000" dist="38000" dir="5400000" rotWithShape="0">
               <a:srgbClr val="20242E">
@@ -10347,7 +10334,6 @@
               <a:srgbClr val="E4E3DE"/>
             </a:solidFill>
           </a:ln>
-          <a:effectLst/>
           <a:effectLst>
             <a:outerShdw blurRad="90000" dist="38000" dir="5400000" rotWithShape="0">
               <a:srgbClr val="20242E">
@@ -10501,7 +10487,6 @@
               <a:srgbClr val="E4E3DE"/>
             </a:solidFill>
           </a:ln>
-          <a:effectLst/>
           <a:effectLst>
             <a:outerShdw blurRad="90000" dist="38000" dir="5400000" rotWithShape="0">
               <a:srgbClr val="20242E">
@@ -10655,7 +10640,6 @@
               <a:srgbClr val="E4E3DE"/>
             </a:solidFill>
           </a:ln>
-          <a:effectLst/>
           <a:effectLst>
             <a:outerShdw blurRad="90000" dist="38000" dir="5400000" rotWithShape="0">
               <a:srgbClr val="20242E">
@@ -10809,7 +10793,6 @@
               <a:srgbClr val="E4E3DE"/>
             </a:solidFill>
           </a:ln>
-          <a:effectLst/>
           <a:effectLst>
             <a:outerShdw blurRad="90000" dist="38000" dir="5400000" rotWithShape="0">
               <a:srgbClr val="20242E">
@@ -10963,7 +10946,6 @@
               <a:srgbClr val="E4E3DE"/>
             </a:solidFill>
           </a:ln>
-          <a:effectLst/>
           <a:effectLst>
             <a:outerShdw blurRad="90000" dist="38000" dir="5400000" rotWithShape="0">
               <a:srgbClr val="20242E">
@@ -11117,7 +11099,6 @@
               <a:srgbClr val="E4E3DE"/>
             </a:solidFill>
           </a:ln>
-          <a:effectLst/>
           <a:effectLst>
             <a:outerShdw blurRad="90000" dist="38000" dir="5400000" rotWithShape="0">
               <a:srgbClr val="20242E">
@@ -11271,7 +11252,6 @@
               <a:srgbClr val="D64550"/>
             </a:solidFill>
           </a:ln>
-          <a:effectLst/>
           <a:effectLst>
             <a:outerShdw blurRad="90000" dist="38000" dir="5400000" rotWithShape="0">
               <a:srgbClr val="20242E">
@@ -11425,7 +11405,6 @@
               <a:srgbClr val="D64550"/>
             </a:solidFill>
           </a:ln>
-          <a:effectLst/>
           <a:effectLst>
             <a:outerShdw blurRad="90000" dist="38000" dir="5400000" rotWithShape="0">
               <a:srgbClr val="20242E">
@@ -11579,7 +11558,6 @@
               <a:srgbClr val="E4E3DE"/>
             </a:solidFill>
           </a:ln>
-          <a:effectLst/>
           <a:effectLst>
             <a:outerShdw blurRad="90000" dist="38000" dir="5400000" rotWithShape="0">
               <a:srgbClr val="20242E">
@@ -11733,7 +11711,6 @@
               <a:srgbClr val="E4E3DE"/>
             </a:solidFill>
           </a:ln>
-          <a:effectLst/>
           <a:effectLst>
             <a:outerShdw blurRad="90000" dist="38000" dir="5400000" rotWithShape="0">
               <a:srgbClr val="20242E">
@@ -11887,7 +11864,6 @@
               <a:srgbClr val="E4E3DE"/>
             </a:solidFill>
           </a:ln>
-          <a:effectLst/>
           <a:effectLst>
             <a:outerShdw blurRad="90000" dist="38000" dir="5400000" rotWithShape="0">
               <a:srgbClr val="20242E">
@@ -12041,7 +12017,6 @@
               <a:srgbClr val="E4E3DE"/>
             </a:solidFill>
           </a:ln>
-          <a:effectLst/>
           <a:effectLst>
             <a:outerShdw blurRad="90000" dist="38000" dir="5400000" rotWithShape="0">
               <a:srgbClr val="20242E">
@@ -12195,7 +12170,6 @@
               <a:srgbClr val="E4E3DE"/>
             </a:solidFill>
           </a:ln>
-          <a:effectLst/>
           <a:effectLst>
             <a:outerShdw blurRad="90000" dist="38000" dir="5400000" rotWithShape="0">
               <a:srgbClr val="20242E">
@@ -12349,7 +12323,6 @@
               <a:srgbClr val="E4E3DE"/>
             </a:solidFill>
           </a:ln>
-          <a:effectLst/>
           <a:effectLst>
             <a:outerShdw blurRad="90000" dist="38000" dir="5400000" rotWithShape="0">
               <a:srgbClr val="20242E">
@@ -12503,7 +12476,6 @@
               <a:srgbClr val="E4E3DE"/>
             </a:solidFill>
           </a:ln>
-          <a:effectLst/>
           <a:effectLst>
             <a:outerShdw blurRad="90000" dist="38000" dir="5400000" rotWithShape="0">
               <a:srgbClr val="20242E">
@@ -12657,7 +12629,6 @@
               <a:srgbClr val="E4E3DE"/>
             </a:solidFill>
           </a:ln>
-          <a:effectLst/>
           <a:effectLst>
             <a:outerShdw blurRad="90000" dist="38000" dir="5400000" rotWithShape="0">
               <a:srgbClr val="20242E">
@@ -12811,7 +12782,6 @@
               <a:srgbClr val="D64550"/>
             </a:solidFill>
           </a:ln>
-          <a:effectLst/>
           <a:effectLst>
             <a:outerShdw blurRad="90000" dist="38000" dir="5400000" rotWithShape="0">
               <a:srgbClr val="20242E">
@@ -12965,7 +12935,6 @@
               <a:srgbClr val="D64550"/>
             </a:solidFill>
           </a:ln>
-          <a:effectLst/>
           <a:effectLst>
             <a:outerShdw blurRad="90000" dist="38000" dir="5400000" rotWithShape="0">
               <a:srgbClr val="20242E">
@@ -13602,7 +13571,6 @@
               <a:srgbClr val="E4E3DE"/>
             </a:solidFill>
           </a:ln>
-          <a:effectLst/>
           <a:effectLst>
             <a:outerShdw blurRad="90000" dist="38000" dir="5400000" rotWithShape="0">
               <a:srgbClr val="20242E">
@@ -13878,7 +13846,6 @@
               <a:srgbClr val="DC2626"/>
             </a:solidFill>
           </a:ln>
-          <a:effectLst/>
           <a:effectLst>
             <a:outerShdw blurRad="90000" dist="38000" dir="5400000" rotWithShape="0">
               <a:srgbClr val="20242E">
@@ -14027,7 +13994,6 @@
               <a:srgbClr val="D64550"/>
             </a:solidFill>
           </a:ln>
-          <a:effectLst/>
           <a:effectLst>
             <a:outerShdw blurRad="90000" dist="38000" dir="5400000" rotWithShape="0">
               <a:srgbClr val="20242E">
@@ -15003,7 +14969,6 @@
               <a:srgbClr val="E4E3DE"/>
             </a:solidFill>
           </a:ln>
-          <a:effectLst/>
           <a:effectLst>
             <a:outerShdw blurRad="90000" dist="38000" dir="5400000" rotWithShape="0">
               <a:srgbClr val="20242E">
@@ -15172,7 +15137,6 @@
               <a:srgbClr val="E4E3DE"/>
             </a:solidFill>
           </a:ln>
-          <a:effectLst/>
           <a:effectLst>
             <a:outerShdw blurRad="90000" dist="38000" dir="5400000" rotWithShape="0">
               <a:srgbClr val="20242E">
@@ -15341,7 +15305,6 @@
               <a:srgbClr val="E4E3DE"/>
             </a:solidFill>
           </a:ln>
-          <a:effectLst/>
           <a:effectLst>
             <a:outerShdw blurRad="90000" dist="38000" dir="5400000" rotWithShape="0">
               <a:srgbClr val="20242E">
@@ -15510,7 +15473,6 @@
               <a:srgbClr val="E4E3DE"/>
             </a:solidFill>
           </a:ln>
-          <a:effectLst/>
           <a:effectLst>
             <a:outerShdw blurRad="90000" dist="38000" dir="5400000" rotWithShape="0">
               <a:srgbClr val="20242E">
@@ -15679,7 +15641,6 @@
               <a:srgbClr val="E4E3DE"/>
             </a:solidFill>
           </a:ln>
-          <a:effectLst/>
           <a:effectLst>
             <a:outerShdw blurRad="90000" dist="38000" dir="5400000" rotWithShape="0">
               <a:srgbClr val="20242E">
@@ -15848,7 +15809,6 @@
               <a:srgbClr val="E4E3DE"/>
             </a:solidFill>
           </a:ln>
-          <a:effectLst/>
           <a:effectLst>
             <a:outerShdw blurRad="90000" dist="38000" dir="5400000" rotWithShape="0">
               <a:srgbClr val="20242E">
@@ -16017,7 +15977,6 @@
               <a:srgbClr val="E4E3DE"/>
             </a:solidFill>
           </a:ln>
-          <a:effectLst/>
           <a:effectLst>
             <a:outerShdw blurRad="90000" dist="38000" dir="5400000" rotWithShape="0">
               <a:srgbClr val="20242E">
@@ -16186,7 +16145,6 @@
               <a:srgbClr val="E4E3DE"/>
             </a:solidFill>
           </a:ln>
-          <a:effectLst/>
           <a:effectLst>
             <a:outerShdw blurRad="90000" dist="38000" dir="5400000" rotWithShape="0">
               <a:srgbClr val="20242E">
@@ -16355,7 +16313,6 @@
               <a:srgbClr val="E4E3DE"/>
             </a:solidFill>
           </a:ln>
-          <a:effectLst/>
           <a:effectLst>
             <a:outerShdw blurRad="90000" dist="38000" dir="5400000" rotWithShape="0">
               <a:srgbClr val="20242E">
@@ -16524,7 +16481,6 @@
               <a:srgbClr val="E4E3DE"/>
             </a:solidFill>
           </a:ln>
-          <a:effectLst/>
           <a:effectLst>
             <a:outerShdw blurRad="90000" dist="38000" dir="5400000" rotWithShape="0">
               <a:srgbClr val="20242E">
@@ -17273,7 +17229,6 @@
               <a:srgbClr val="E4E3DE"/>
             </a:solidFill>
           </a:ln>
-          <a:effectLst/>
           <a:effectLst>
             <a:outerShdw blurRad="90000" dist="38000" dir="5400000" rotWithShape="0">
               <a:srgbClr val="20242E">
@@ -18528,7 +18483,6 @@
               <a:srgbClr val="D64550"/>
             </a:solidFill>
           </a:ln>
-          <a:effectLst/>
           <a:effectLst>
             <a:outerShdw blurRad="90000" dist="38000" dir="5400000" rotWithShape="0">
               <a:srgbClr val="20242E">
@@ -19356,7 +19310,6 @@
               <a:srgbClr val="E4E3DE"/>
             </a:solidFill>
           </a:ln>
-          <a:effectLst/>
           <a:effectLst>
             <a:outerShdw blurRad="90000" dist="38000" dir="5400000" rotWithShape="0">
               <a:srgbClr val="20242E">
@@ -19567,7 +19520,6 @@
               <a:srgbClr val="E4E3DE"/>
             </a:solidFill>
           </a:ln>
-          <a:effectLst/>
           <a:effectLst>
             <a:outerShdw blurRad="90000" dist="38000" dir="5400000" rotWithShape="0">
               <a:srgbClr val="20242E">
@@ -19778,7 +19730,6 @@
               <a:srgbClr val="D64550"/>
             </a:solidFill>
           </a:ln>
-          <a:effectLst/>
           <a:effectLst>
             <a:outerShdw blurRad="90000" dist="38000" dir="5400000" rotWithShape="0">
               <a:srgbClr val="20242E">
@@ -20698,7 +20649,6 @@
               <a:srgbClr val="E4E3DE"/>
             </a:solidFill>
           </a:ln>
-          <a:effectLst/>
           <a:effectLst>
             <a:outerShdw blurRad="90000" dist="38000" dir="5400000" rotWithShape="0">
               <a:srgbClr val="20242E">
@@ -21143,7 +21093,6 @@
               <a:srgbClr val="E4E3DE"/>
             </a:solidFill>
           </a:ln>
-          <a:effectLst/>
           <a:effectLst>
             <a:outerShdw blurRad="90000" dist="38000" dir="5400000" rotWithShape="0">
               <a:srgbClr val="20242E">
@@ -21588,7 +21537,6 @@
               <a:srgbClr val="DC2626"/>
             </a:solidFill>
           </a:ln>
-          <a:effectLst/>
           <a:effectLst>
             <a:outerShdw blurRad="90000" dist="38000" dir="5400000" rotWithShape="0">
               <a:srgbClr val="20242E">
@@ -22088,7 +22036,6 @@
               <a:srgbClr val="E4E3DE"/>
             </a:solidFill>
           </a:ln>
-          <a:effectLst/>
           <a:effectLst>
             <a:outerShdw blurRad="90000" dist="38000" dir="5400000" rotWithShape="0">
               <a:srgbClr val="20242E">
@@ -22533,7 +22480,6 @@
               <a:srgbClr val="E4E3DE"/>
             </a:solidFill>
           </a:ln>
-          <a:effectLst/>
           <a:effectLst>
             <a:outerShdw blurRad="90000" dist="38000" dir="5400000" rotWithShape="0">
               <a:srgbClr val="20242E">
@@ -22978,7 +22924,6 @@
               <a:srgbClr val="E4E3DE"/>
             </a:solidFill>
           </a:ln>
-          <a:effectLst/>
           <a:effectLst>
             <a:outerShdw blurRad="90000" dist="38000" dir="5400000" rotWithShape="0">
               <a:srgbClr val="20242E">
@@ -23423,7 +23368,6 @@
               <a:srgbClr val="D64550"/>
             </a:solidFill>
           </a:ln>
-          <a:effectLst/>
           <a:effectLst>
             <a:outerShdw blurRad="90000" dist="38000" dir="5400000" rotWithShape="0">
               <a:srgbClr val="20242E">
@@ -24644,7 +24588,6 @@
               <a:srgbClr val="E4E3DE"/>
             </a:solidFill>
           </a:ln>
-          <a:effectLst/>
           <a:effectLst>
             <a:outerShdw blurRad="90000" dist="38000" dir="5400000" rotWithShape="0">
               <a:srgbClr val="20242E">
@@ -25068,7 +25011,6 @@
               <a:srgbClr val="E4E3DE"/>
             </a:solidFill>
           </a:ln>
-          <a:effectLst/>
           <a:effectLst>
             <a:outerShdw blurRad="90000" dist="38000" dir="5400000" rotWithShape="0">
               <a:srgbClr val="20242E">
@@ -25492,7 +25434,6 @@
               <a:srgbClr val="E4E3DE"/>
             </a:solidFill>
           </a:ln>
-          <a:effectLst/>
           <a:effectLst>
             <a:outerShdw blurRad="90000" dist="38000" dir="5400000" rotWithShape="0">
               <a:srgbClr val="20242E">
@@ -26444,7 +26385,6 @@
               <a:srgbClr val="D64550"/>
             </a:solidFill>
           </a:ln>
-          <a:effectLst/>
           <a:effectLst>
             <a:outerShdw blurRad="90000" dist="38000" dir="5400000" rotWithShape="0">
               <a:srgbClr val="20242E">
@@ -26814,7 +26754,6 @@
               <a:srgbClr val="E4E3DE"/>
             </a:solidFill>
           </a:ln>
-          <a:effectLst/>
           <a:effectLst>
             <a:outerShdw blurRad="90000" dist="38000" dir="5400000" rotWithShape="0">
               <a:srgbClr val="20242E">
@@ -28266,7 +28205,6 @@
               <a:srgbClr val="E4E3DE"/>
             </a:solidFill>
           </a:ln>
-          <a:effectLst/>
           <a:effectLst>
             <a:outerShdw blurRad="90000" dist="38000" dir="5400000" rotWithShape="0">
               <a:srgbClr val="20242E">
@@ -29014,7 +28952,6 @@
               <a:srgbClr val="DC2626"/>
             </a:solidFill>
           </a:ln>
-          <a:effectLst/>
           <a:effectLst>
             <a:outerShdw blurRad="90000" dist="38000" dir="5400000" rotWithShape="0">
               <a:srgbClr val="20242E">
@@ -29974,7 +29911,6 @@
               <a:srgbClr val="E4E3DE"/>
             </a:solidFill>
           </a:ln>
-          <a:effectLst/>
           <a:effectLst>
             <a:outerShdw blurRad="90000" dist="38000" dir="5400000" rotWithShape="0">
               <a:srgbClr val="20242E">
@@ -30335,7 +30271,6 @@
               <a:srgbClr val="D64550"/>
             </a:solidFill>
           </a:ln>
-          <a:effectLst/>
           <a:effectLst>
             <a:outerShdw blurRad="90000" dist="38000" dir="5400000" rotWithShape="0">
               <a:srgbClr val="20242E">
@@ -30614,7 +30549,6 @@
               <a:srgbClr val="D64550"/>
             </a:solidFill>
           </a:ln>
-          <a:effectLst/>
           <a:effectLst>
             <a:outerShdw blurRad="90000" dist="38000" dir="5400000" rotWithShape="0">
               <a:srgbClr val="20242E">
